--- a/downloads/content-webinar.pptx
+++ b/downloads/content-webinar.pptx
@@ -9,6 +9,8 @@
     <p:sldId id="257" r:id="rId3"/>
     <p:sldId id="258" r:id="rId4"/>
     <p:sldId id="259" r:id="rId5"/>
+    <p:sldId id="262" r:id="rId13"/>
+    <p:sldId id="263" r:id="rId14"/>
     <p:sldId id="260" r:id="rId6"/>
     <p:sldId id="261" r:id="rId7"/>
   </p:sldIdLst>
@@ -1586,7 +1588,7 @@
         </p:nvSpPr>
         <p:spPr>
           <a:xfrm>
-            <a:off x="822960" y="1737360"/>
+            <a:off x="10908792" y="1737360"/>
             <a:ext cx="457200" cy="457200"/>
           </a:xfrm>
           <a:prstGeom prst="ellipse">
@@ -1606,7 +1608,7 @@
         </p:nvSpPr>
         <p:spPr>
           <a:xfrm>
-            <a:off x="822960" y="1737360"/>
+            <a:off x="10908792" y="1737360"/>
             <a:ext cx="457200" cy="457200"/>
           </a:xfrm>
           <a:prstGeom prst="rect">
@@ -1642,8 +1644,8 @@
         </p:nvSpPr>
         <p:spPr>
           <a:xfrm>
-            <a:off x="1463040" y="1783080"/>
-            <a:ext cx="9144000" cy="457200"/>
+            <a:off x="1280160" y="1783080"/>
+            <a:ext cx="9418320" cy="457200"/>
           </a:xfrm>
           <a:prstGeom prst="rect">
             <a:avLst/>
@@ -1681,7 +1683,7 @@
         </p:nvSpPr>
         <p:spPr>
           <a:xfrm>
-            <a:off x="822960" y="2514600"/>
+            <a:off x="10908792" y="2514600"/>
             <a:ext cx="457200" cy="457200"/>
           </a:xfrm>
           <a:prstGeom prst="ellipse">
@@ -1701,7 +1703,7 @@
         </p:nvSpPr>
         <p:spPr>
           <a:xfrm>
-            <a:off x="822960" y="2514600"/>
+            <a:off x="10908792" y="2514600"/>
             <a:ext cx="457200" cy="457200"/>
           </a:xfrm>
           <a:prstGeom prst="rect">
@@ -1737,8 +1739,8 @@
         </p:nvSpPr>
         <p:spPr>
           <a:xfrm>
-            <a:off x="1463040" y="2560320"/>
-            <a:ext cx="9144000" cy="457200"/>
+            <a:off x="1280160" y="2560320"/>
+            <a:ext cx="9418320" cy="457200"/>
           </a:xfrm>
           <a:prstGeom prst="rect">
             <a:avLst/>
@@ -1776,7 +1778,7 @@
         </p:nvSpPr>
         <p:spPr>
           <a:xfrm>
-            <a:off x="822960" y="3291840"/>
+            <a:off x="10908792" y="3291840"/>
             <a:ext cx="457200" cy="457200"/>
           </a:xfrm>
           <a:prstGeom prst="ellipse">
@@ -1796,7 +1798,7 @@
         </p:nvSpPr>
         <p:spPr>
           <a:xfrm>
-            <a:off x="822960" y="3291840"/>
+            <a:off x="10908792" y="3291840"/>
             <a:ext cx="457200" cy="457200"/>
           </a:xfrm>
           <a:prstGeom prst="rect">
@@ -1832,8 +1834,8 @@
         </p:nvSpPr>
         <p:spPr>
           <a:xfrm>
-            <a:off x="1463040" y="3337560"/>
-            <a:ext cx="9144000" cy="457200"/>
+            <a:off x="1280160" y="3337560"/>
+            <a:ext cx="9418320" cy="457200"/>
           </a:xfrm>
           <a:prstGeom prst="rect">
             <a:avLst/>
@@ -1871,7 +1873,7 @@
         </p:nvSpPr>
         <p:spPr>
           <a:xfrm>
-            <a:off x="822960" y="4069080"/>
+            <a:off x="10908792" y="4069080"/>
             <a:ext cx="457200" cy="457200"/>
           </a:xfrm>
           <a:prstGeom prst="ellipse">
@@ -1891,7 +1893,7 @@
         </p:nvSpPr>
         <p:spPr>
           <a:xfrm>
-            <a:off x="822960" y="4069080"/>
+            <a:off x="10908792" y="4069080"/>
             <a:ext cx="457200" cy="457200"/>
           </a:xfrm>
           <a:prstGeom prst="rect">
@@ -1927,8 +1929,8 @@
         </p:nvSpPr>
         <p:spPr>
           <a:xfrm>
-            <a:off x="1463040" y="4114800"/>
-            <a:ext cx="9144000" cy="457200"/>
+            <a:off x="1280160" y="4114800"/>
+            <a:ext cx="9418320" cy="457200"/>
           </a:xfrm>
           <a:prstGeom prst="rect">
             <a:avLst/>
@@ -1952,7 +1954,7 @@
                 <a:ea typeface="Calibri" pitchFamily="34" charset="-122"/>
                 <a:cs typeface="Calibri" pitchFamily="34" charset="-120"/>
               </a:rPr>
-              <a:t>דוגמאות מהשטח</a:t>
+              <a:t>דוגמה מהשטח</a:t>
             </a:r>
             <a:endParaRPr lang="en-US" sz="1600" dirty="0"/>
           </a:p>
@@ -1966,7 +1968,7 @@
         </p:nvSpPr>
         <p:spPr>
           <a:xfrm>
-            <a:off x="822960" y="4846320"/>
+            <a:off x="10908792" y="4846320"/>
             <a:ext cx="457200" cy="457200"/>
           </a:xfrm>
           <a:prstGeom prst="ellipse">
@@ -1986,7 +1988,7 @@
         </p:nvSpPr>
         <p:spPr>
           <a:xfrm>
-            <a:off x="822960" y="4846320"/>
+            <a:off x="10908792" y="4846320"/>
             <a:ext cx="457200" cy="457200"/>
           </a:xfrm>
           <a:prstGeom prst="rect">
@@ -2022,8 +2024,8 @@
         </p:nvSpPr>
         <p:spPr>
           <a:xfrm>
-            <a:off x="1463040" y="4892040"/>
-            <a:ext cx="9144000" cy="457200"/>
+            <a:off x="1280160" y="4892040"/>
+            <a:ext cx="9418320" cy="457200"/>
           </a:xfrm>
           <a:prstGeom prst="rect">
             <a:avLst/>
@@ -2142,7 +2144,7 @@
                 <a:ea typeface="Calibri" pitchFamily="34" charset="-122"/>
                 <a:cs typeface="Calibri" pitchFamily="34" charset="-120"/>
               </a:rPr>
-              <a:t>עקרון ראשון: התחילו מהבעיה</a:t>
+              <a:t>עיקרון ראשון: התחילו מהבעיה</a:t>
             </a:r>
             <a:endParaRPr lang="en-US" sz="2800" dirty="0"/>
           </a:p>
@@ -2276,7 +2278,7 @@
                 <a:ea typeface="Calibri" pitchFamily="34" charset="-122"/>
                 <a:cs typeface="Calibri" pitchFamily="34" charset="-120"/>
               </a:rPr>
-              <a:t>עקרון שני: מדדו כל דבר</a:t>
+              <a:t>עיקרון שני: מדדו כל דבר</a:t>
             </a:r>
             <a:endParaRPr lang="en-US" sz="2800" dirty="0"/>
           </a:p>
@@ -2408,7 +2410,7 @@
         </p:blipFill>
         <p:spPr>
           <a:xfrm>
-            <a:off x="822960" y="1828800"/>
+            <a:off x="11000232" y="1828800"/>
             <a:ext cx="365760" cy="365760"/>
           </a:xfrm>
           <a:prstGeom prst="rect">
@@ -2424,8 +2426,8 @@
         </p:nvSpPr>
         <p:spPr>
           <a:xfrm>
-            <a:off x="1371600" y="1783080"/>
-            <a:ext cx="9326880" cy="548640"/>
+            <a:off x="1188720" y="1783080"/>
+            <a:ext cx="9601200" cy="548640"/>
           </a:xfrm>
           <a:prstGeom prst="rect">
             <a:avLst/>
@@ -2471,7 +2473,7 @@
         </p:blipFill>
         <p:spPr>
           <a:xfrm>
-            <a:off x="822960" y="2697480"/>
+            <a:off x="11000232" y="2697480"/>
             <a:ext cx="365760" cy="365760"/>
           </a:xfrm>
           <a:prstGeom prst="rect">
@@ -2487,8 +2489,8 @@
         </p:nvSpPr>
         <p:spPr>
           <a:xfrm>
-            <a:off x="1371600" y="2651760"/>
-            <a:ext cx="9326880" cy="548640"/>
+            <a:off x="1188720" y="2651760"/>
+            <a:ext cx="9601200" cy="548640"/>
           </a:xfrm>
           <a:prstGeom prst="rect">
             <a:avLst/>
@@ -2534,7 +2536,7 @@
         </p:blipFill>
         <p:spPr>
           <a:xfrm>
-            <a:off x="822960" y="3566160"/>
+            <a:off x="11000232" y="3566160"/>
             <a:ext cx="365760" cy="365760"/>
           </a:xfrm>
           <a:prstGeom prst="rect">
@@ -2550,8 +2552,8 @@
         </p:nvSpPr>
         <p:spPr>
           <a:xfrm>
-            <a:off x="1371600" y="3520440"/>
-            <a:ext cx="9326880" cy="548640"/>
+            <a:off x="1188720" y="3520440"/>
+            <a:ext cx="9601200" cy="548640"/>
           </a:xfrm>
           <a:prstGeom prst="rect">
             <a:avLst/>
@@ -2814,6 +2816,554 @@
               <a:t>www.yourbrand.co.il</a:t>
             </a:r>
             <a:endParaRPr lang="en-US" sz="1300" dirty="0"/>
+          </a:p>
+        </p:txBody>
+      </p:sp>
+    </p:spTree>
+  </p:cSld>
+  <p:clrMapOvr>
+    <a:masterClrMapping/>
+  </p:clrMapOvr>
+</p:sld>
+</file>
+
+<file path=ppt/slides/slide7.xml><?xml version="1.0" encoding="utf-8"?>
+<p:sld xmlns:a="http://schemas.openxmlformats.org/drawingml/2006/main" xmlns:p="http://schemas.openxmlformats.org/presentationml/2006/main" xmlns:r="http://schemas.openxmlformats.org/officeDocument/2006/relationships">
+  <p:cSld>
+    <p:bg>
+      <p:bgPr>
+        <a:solidFill>
+          <a:srgbClr val="FBE9DD"/>
+        </a:solidFill>
+      </p:bgPr>
+    </p:bg>
+    <p:spTree>
+      <p:nvGrpSpPr>
+        <p:cNvPr id="1" name=""/>
+        <p:cNvGrpSpPr/>
+        <p:nvPr/>
+      </p:nvGrpSpPr>
+      <p:grpSpPr/>
+      <p:pic>
+        <p:nvPicPr>
+          <p:cNvPr id="2" name="Image 0" descr="preencoded.png">    </p:cNvPr>
+          <p:cNvPicPr>
+            <a:picLocks noChangeAspect="1"/>
+          </p:cNvPicPr>
+          <p:nvPr/>
+        </p:nvPicPr>
+        <p:blipFill>
+          <a:blip r:embed="rId2"/>
+          <a:stretch>
+            <a:fillRect/>
+          </a:stretch>
+        </p:blipFill>
+        <p:spPr>
+          <a:xfrm>
+            <a:off x="8778240" y="2377440"/>
+            <a:ext cx="2011680" cy="2011680"/>
+          </a:xfrm>
+          <a:prstGeom prst="rect">
+            <a:avLst/>
+          </a:prstGeom>
+        </p:spPr>
+      </p:pic>
+      <p:sp>
+        <p:nvSpPr>
+          <p:cNvPr id="3" name="Text 0"/>
+          <p:cNvSpPr/>
+          <p:nvPr/>
+        </p:nvSpPr>
+        <p:spPr>
+          <a:xfrm>
+            <a:off x="822960" y="2103120"/>
+            <a:ext cx="7589520" cy="1097280"/>
+          </a:xfrm>
+          <a:prstGeom prst="rect">
+            <a:avLst/>
+          </a:prstGeom>
+          <a:noFill/>
+          <a:ln/>
+        </p:spPr>
+        <p:txBody>
+          <a:bodyPr wrap="square" rtlCol="0" anchor="ctr"/>
+          <a:lstStyle/>
+          <a:p>
+            <a:pPr rtl="1" algn="r" indent="0" marL="0">
+              <a:buNone/>
+            </a:pPr>
+            <a:r>
+              <a:rPr lang="en-US" sz="2800" b="1" dirty="0">
+                <a:solidFill>
+                  <a:srgbClr val="1A1A1A"/>
+                </a:solidFill>
+                <a:latin typeface="Calibri" pitchFamily="34" charset="0"/>
+                <a:ea typeface="Calibri" pitchFamily="34" charset="-122"/>
+                <a:cs typeface="Calibri" pitchFamily="34" charset="-120"/>
+              </a:rPr>
+              <a:t>עיקרון שלישי: שתפו ידע</a:t>
+            </a:r>
+            <a:endParaRPr lang="en-US" sz="2800" dirty="0"/>
+          </a:p>
+        </p:txBody>
+      </p:sp>
+      <p:sp>
+        <p:nvSpPr>
+          <p:cNvPr id="4" name="Text 1"/>
+          <p:cNvSpPr/>
+          <p:nvPr/>
+        </p:nvSpPr>
+        <p:spPr>
+          <a:xfrm>
+            <a:off x="822960" y="3200400"/>
+            <a:ext cx="7589520" cy="1371600"/>
+          </a:xfrm>
+          <a:prstGeom prst="rect">
+            <a:avLst/>
+          </a:prstGeom>
+          <a:noFill/>
+          <a:ln/>
+        </p:spPr>
+        <p:txBody>
+          <a:bodyPr wrap="square" rtlCol="0" anchor="t"/>
+          <a:lstStyle/>
+          <a:p>
+            <a:pPr rtl="1" algn="r" indent="0" marL="0">
+              <a:buNone/>
+            </a:pPr>
+            <a:r>
+              <a:rPr lang="en-US" sz="1500" dirty="0">
+                <a:solidFill>
+                  <a:srgbClr val="1A1A1A"/>
+                </a:solidFill>
+                <a:latin typeface="Calibri" pitchFamily="34" charset="0"/>
+                <a:ea typeface="Calibri" pitchFamily="34" charset="-122"/>
+                <a:cs typeface="Calibri" pitchFamily="34" charset="-120"/>
+              </a:rPr>
+              <a:t>תנו ערך אמיתי עוד לפני שאתם מבקשים משהו בתמורה. ידע שאתם משתפים בנדיבות בונה אמון וממצב אתכם כמומחים.</a:t>
+            </a:r>
+            <a:endParaRPr lang="en-US" sz="1500" dirty="0"/>
+          </a:p>
+        </p:txBody>
+      </p:sp>
+    </p:spTree>
+  </p:cSld>
+  <p:clrMapOvr>
+    <a:masterClrMapping/>
+  </p:clrMapOvr>
+</p:sld>
+</file>
+
+<file path=ppt/slides/slide8.xml><?xml version="1.0" encoding="utf-8"?>
+<p:sld xmlns:a="http://schemas.openxmlformats.org/drawingml/2006/main" xmlns:p="http://schemas.openxmlformats.org/presentationml/2006/main" xmlns:r="http://schemas.openxmlformats.org/officeDocument/2006/relationships">
+  <p:cSld>
+    <p:bg>
+      <p:bgPr>
+        <a:solidFill>
+          <a:srgbClr val="FFFFFF"/>
+        </a:solidFill>
+      </p:bgPr>
+    </p:bg>
+    <p:spTree>
+      <p:nvGrpSpPr>
+        <p:cNvPr id="2" name=""/>
+        <p:cNvGrpSpPr/>
+        <p:nvPr/>
+      </p:nvGrpSpPr>
+      <p:grpSpPr/>
+      <p:sp>
+        <p:nvSpPr>
+          <p:cNvPr id="3" name="Text 0"/>
+          <p:cNvSpPr/>
+          <p:nvPr/>
+        </p:nvSpPr>
+        <p:spPr>
+          <a:xfrm>
+            <a:off x="640080" y="548640"/>
+            <a:ext cx="10881360" cy="731520"/>
+          </a:xfrm>
+          <a:prstGeom prst="rect">
+            <a:avLst/>
+          </a:prstGeom>
+          <a:noFill/>
+          <a:ln/>
+        </p:spPr>
+        <p:txBody>
+          <a:bodyPr wrap="square" rtlCol="0" anchor="ctr"/>
+          <a:lstStyle/>
+          <a:p>
+            <a:pPr rtl="1" algn="r" indent="0" marL="0">
+              <a:buNone/>
+            </a:pPr>
+            <a:r>
+              <a:rPr lang="en-US" sz="3200" b="1" dirty="0">
+                <a:solidFill>
+                  <a:srgbClr val="C2410C"/>
+                </a:solidFill>
+                <a:latin typeface="Calibri" pitchFamily="34" charset="0"/>
+                <a:ea typeface="Calibri" pitchFamily="34" charset="-122"/>
+                <a:cs typeface="Calibri" pitchFamily="34" charset="-120"/>
+              </a:rPr>
+              <a:t>דוגמה מהשטח</a:t>
+            </a:r>
+            <a:endParaRPr lang="en-US" sz="3200" dirty="0"/>
+          </a:p>
+        </p:txBody>
+      </p:sp>
+      <p:sp>
+        <p:nvSpPr>
+          <p:cNvPr id="4" name="Text 0"/>
+          <p:cNvSpPr/>
+          <p:nvPr/>
+        </p:nvSpPr>
+        <p:spPr>
+          <a:xfrm>
+            <a:off x="640080" y="5257800"/>
+            <a:ext cx="10881360" cy="457200"/>
+          </a:xfrm>
+          <a:prstGeom prst="rect">
+            <a:avLst/>
+          </a:prstGeom>
+          <a:noFill/>
+          <a:ln/>
+        </p:spPr>
+        <p:txBody>
+          <a:bodyPr wrap="square" rtlCol="0" anchor="ctr"/>
+          <a:lstStyle/>
+          <a:p>
+            <a:pPr rtl="1" algn="r" indent="0" marL="0">
+              <a:buNone/>
+            </a:pPr>
+            <a:r>
+              <a:rPr lang="en-US" sz="1300" b="0" dirty="0">
+                <a:solidFill>
+                  <a:srgbClr val="6B6B6B"/>
+                </a:solidFill>
+                <a:latin typeface="Calibri" pitchFamily="34" charset="0"/>
+                <a:ea typeface="Calibri" pitchFamily="34" charset="-122"/>
+                <a:cs typeface="Calibri" pitchFamily="34" charset="-120"/>
+              </a:rPr>
+              <a:t>החליפו בסיפור אמיתי מהעבודה שלכם — עם מספרים, אם יש</a:t>
+            </a:r>
+            <a:endParaRPr lang="en-US" sz="1300" dirty="0"/>
+          </a:p>
+        </p:txBody>
+      </p:sp>
+      <p:sp>
+        <p:nvSpPr>
+          <p:cNvPr id="5" name="Shape 1"/>
+          <p:cNvSpPr/>
+          <p:nvPr/>
+        </p:nvSpPr>
+        <p:spPr>
+          <a:xfrm>
+            <a:off x="10908792" y="1828800"/>
+            <a:ext cx="457200" cy="457200"/>
+          </a:xfrm>
+          <a:prstGeom prst="ellipse">
+            <a:avLst/>
+          </a:prstGeom>
+          <a:solidFill>
+            <a:srgbClr val="C2410C"/>
+          </a:solidFill>
+          <a:ln/>
+        </p:spPr>
+      </p:sp>
+      <p:sp>
+        <p:nvSpPr>
+          <p:cNvPr id="6" name="Text 2"/>
+          <p:cNvSpPr/>
+          <p:nvPr/>
+        </p:nvSpPr>
+        <p:spPr>
+          <a:xfrm>
+            <a:off x="10908792" y="1828800"/>
+            <a:ext cx="457200" cy="457200"/>
+          </a:xfrm>
+          <a:prstGeom prst="rect">
+            <a:avLst/>
+          </a:prstGeom>
+          <a:noFill/>
+          <a:ln/>
+        </p:spPr>
+        <p:txBody>
+          <a:bodyPr wrap="square" rtlCol="0" anchor="ctr"/>
+          <a:lstStyle/>
+          <a:p>
+            <a:pPr algn="ctr" indent="0" marL="0">
+              <a:buNone/>
+            </a:pPr>
+            <a:r>
+              <a:rPr lang="en-US" sz="1600" b="1" dirty="0">
+                <a:solidFill>
+                  <a:srgbClr val="FFFFFF"/>
+                </a:solidFill>
+              </a:rPr>
+              <a:t>1</a:t>
+            </a:r>
+            <a:endParaRPr lang="en-US" sz="1600" dirty="0"/>
+          </a:p>
+        </p:txBody>
+      </p:sp>
+      <p:sp>
+        <p:nvSpPr>
+          <p:cNvPr id="7" name="Text 3"/>
+          <p:cNvSpPr/>
+          <p:nvPr/>
+        </p:nvSpPr>
+        <p:spPr>
+          <a:xfrm>
+            <a:off x="1280160" y="1874519"/>
+            <a:ext cx="9418320" cy="457200"/>
+          </a:xfrm>
+          <a:prstGeom prst="rect">
+            <a:avLst/>
+          </a:prstGeom>
+          <a:noFill/>
+          <a:ln/>
+        </p:spPr>
+        <p:txBody>
+          <a:bodyPr wrap="square" rtlCol="0" anchor="ctr"/>
+          <a:lstStyle/>
+          <a:p>
+            <a:pPr rtl="1" algn="r" indent="0" marL="0">
+              <a:buNone/>
+            </a:pPr>
+            <a:r>
+              <a:rPr lang="en-US" sz="1800" dirty="0" b="1">
+                <a:solidFill>
+                  <a:srgbClr val="1A1A1A"/>
+                </a:solidFill>
+                <a:latin typeface="Calibri" pitchFamily="34" charset="0"/>
+                <a:ea typeface="Calibri" pitchFamily="34" charset="-122"/>
+                <a:cs typeface="Calibri" pitchFamily="34" charset="-120"/>
+              </a:rPr>
+              <a:t>האתגר: </a:t>
+            </a:r>
+            <a:r>
+              <a:rPr lang="en-US" sz="1800" dirty="0" b="0">
+                <a:solidFill>
+                  <a:srgbClr val="1A1A1A"/>
+                </a:solidFill>
+                <a:latin typeface="Calibri" pitchFamily="34" charset="0"/>
+                <a:ea typeface="Calibri" pitchFamily="34" charset="-122"/>
+                <a:cs typeface="Calibri" pitchFamily="34" charset="-120"/>
+              </a:rPr>
+              <a:t>עסק קטן השקיע בפרסום בלי לדעת מה באמת מביא לקוחות</a:t>
+            </a:r>
+            <a:endParaRPr lang="en-US" sz="1800" dirty="0"/>
+          </a:p>
+        </p:txBody>
+      </p:sp>
+      <p:sp>
+        <p:nvSpPr>
+          <p:cNvPr id="8" name="Shape 4"/>
+          <p:cNvSpPr/>
+          <p:nvPr/>
+        </p:nvSpPr>
+        <p:spPr>
+          <a:xfrm>
+            <a:off x="10908792" y="2971800"/>
+            <a:ext cx="457200" cy="457200"/>
+          </a:xfrm>
+          <a:prstGeom prst="ellipse">
+            <a:avLst/>
+          </a:prstGeom>
+          <a:solidFill>
+            <a:srgbClr val="C2410C"/>
+          </a:solidFill>
+          <a:ln/>
+        </p:spPr>
+      </p:sp>
+      <p:sp>
+        <p:nvSpPr>
+          <p:cNvPr id="9" name="Text 5"/>
+          <p:cNvSpPr/>
+          <p:nvPr/>
+        </p:nvSpPr>
+        <p:spPr>
+          <a:xfrm>
+            <a:off x="10908792" y="2971800"/>
+            <a:ext cx="457200" cy="457200"/>
+          </a:xfrm>
+          <a:prstGeom prst="rect">
+            <a:avLst/>
+          </a:prstGeom>
+          <a:noFill/>
+          <a:ln/>
+        </p:spPr>
+        <p:txBody>
+          <a:bodyPr wrap="square" rtlCol="0" anchor="ctr"/>
+          <a:lstStyle/>
+          <a:p>
+            <a:pPr algn="ctr" indent="0" marL="0">
+              <a:buNone/>
+            </a:pPr>
+            <a:r>
+              <a:rPr lang="en-US" sz="1600" b="1" dirty="0">
+                <a:solidFill>
+                  <a:srgbClr val="FFFFFF"/>
+                </a:solidFill>
+              </a:rPr>
+              <a:t>2</a:t>
+            </a:r>
+            <a:endParaRPr lang="en-US" sz="1600" dirty="0"/>
+          </a:p>
+        </p:txBody>
+      </p:sp>
+      <p:sp>
+        <p:nvSpPr>
+          <p:cNvPr id="10" name="Text 6"/>
+          <p:cNvSpPr/>
+          <p:nvPr/>
+        </p:nvSpPr>
+        <p:spPr>
+          <a:xfrm>
+            <a:off x="1280160" y="3017520"/>
+            <a:ext cx="9418320" cy="457200"/>
+          </a:xfrm>
+          <a:prstGeom prst="rect">
+            <a:avLst/>
+          </a:prstGeom>
+          <a:noFill/>
+          <a:ln/>
+        </p:spPr>
+        <p:txBody>
+          <a:bodyPr wrap="square" rtlCol="0" anchor="ctr"/>
+          <a:lstStyle/>
+          <a:p>
+            <a:pPr rtl="1" algn="r" indent="0" marL="0">
+              <a:buNone/>
+            </a:pPr>
+            <a:r>
+              <a:rPr lang="en-US" sz="1800" dirty="0" b="1">
+                <a:solidFill>
+                  <a:srgbClr val="1A1A1A"/>
+                </a:solidFill>
+                <a:latin typeface="Calibri" pitchFamily="34" charset="0"/>
+                <a:ea typeface="Calibri" pitchFamily="34" charset="-122"/>
+                <a:cs typeface="Calibri" pitchFamily="34" charset="-120"/>
+              </a:rPr>
+              <a:t>מה עשינו: </a:t>
+            </a:r>
+            <a:r>
+              <a:rPr lang="en-US" sz="1800" dirty="0" b="0">
+                <a:solidFill>
+                  <a:srgbClr val="1A1A1A"/>
+                </a:solidFill>
+                <a:latin typeface="Calibri" pitchFamily="34" charset="0"/>
+                <a:ea typeface="Calibri" pitchFamily="34" charset="-122"/>
+                <a:cs typeface="Calibri" pitchFamily="34" charset="-120"/>
+              </a:rPr>
+              <a:t>הגדרנו שלושה מדדים ברורים ובדקנו אותם מדי שבוע</a:t>
+            </a:r>
+            <a:endParaRPr lang="en-US" sz="1800" dirty="0"/>
+          </a:p>
+        </p:txBody>
+      </p:sp>
+      <p:sp>
+        <p:nvSpPr>
+          <p:cNvPr id="11" name="Shape 7"/>
+          <p:cNvSpPr/>
+          <p:nvPr/>
+        </p:nvSpPr>
+        <p:spPr>
+          <a:xfrm>
+            <a:off x="10908792" y="4114800"/>
+            <a:ext cx="457200" cy="457200"/>
+          </a:xfrm>
+          <a:prstGeom prst="ellipse">
+            <a:avLst/>
+          </a:prstGeom>
+          <a:solidFill>
+            <a:srgbClr val="C2410C"/>
+          </a:solidFill>
+          <a:ln/>
+        </p:spPr>
+      </p:sp>
+      <p:sp>
+        <p:nvSpPr>
+          <p:cNvPr id="12" name="Text 8"/>
+          <p:cNvSpPr/>
+          <p:nvPr/>
+        </p:nvSpPr>
+        <p:spPr>
+          <a:xfrm>
+            <a:off x="10908792" y="4114800"/>
+            <a:ext cx="457200" cy="457200"/>
+          </a:xfrm>
+          <a:prstGeom prst="rect">
+            <a:avLst/>
+          </a:prstGeom>
+          <a:noFill/>
+          <a:ln/>
+        </p:spPr>
+        <p:txBody>
+          <a:bodyPr wrap="square" rtlCol="0" anchor="ctr"/>
+          <a:lstStyle/>
+          <a:p>
+            <a:pPr algn="ctr" indent="0" marL="0">
+              <a:buNone/>
+            </a:pPr>
+            <a:r>
+              <a:rPr lang="en-US" sz="1600" b="1" dirty="0">
+                <a:solidFill>
+                  <a:srgbClr val="FFFFFF"/>
+                </a:solidFill>
+              </a:rPr>
+              <a:t>3</a:t>
+            </a:r>
+            <a:endParaRPr lang="en-US" sz="1600" dirty="0"/>
+          </a:p>
+        </p:txBody>
+      </p:sp>
+      <p:sp>
+        <p:nvSpPr>
+          <p:cNvPr id="13" name="Text 9"/>
+          <p:cNvSpPr/>
+          <p:nvPr/>
+        </p:nvSpPr>
+        <p:spPr>
+          <a:xfrm>
+            <a:off x="1280160" y="4160520"/>
+            <a:ext cx="9418320" cy="457200"/>
+          </a:xfrm>
+          <a:prstGeom prst="rect">
+            <a:avLst/>
+          </a:prstGeom>
+          <a:noFill/>
+          <a:ln/>
+        </p:spPr>
+        <p:txBody>
+          <a:bodyPr wrap="square" rtlCol="0" anchor="ctr"/>
+          <a:lstStyle/>
+          <a:p>
+            <a:pPr rtl="1" algn="r" indent="0" marL="0">
+              <a:buNone/>
+            </a:pPr>
+            <a:r>
+              <a:rPr lang="en-US" sz="1800" dirty="0" b="1">
+                <a:solidFill>
+                  <a:srgbClr val="1A1A1A"/>
+                </a:solidFill>
+                <a:latin typeface="Calibri" pitchFamily="34" charset="0"/>
+                <a:ea typeface="Calibri" pitchFamily="34" charset="-122"/>
+                <a:cs typeface="Calibri" pitchFamily="34" charset="-120"/>
+              </a:rPr>
+              <a:t>התוצאה: </a:t>
+            </a:r>
+            <a:r>
+              <a:rPr lang="en-US" sz="1800" dirty="0" b="0">
+                <a:solidFill>
+                  <a:srgbClr val="1A1A1A"/>
+                </a:solidFill>
+                <a:latin typeface="Calibri" pitchFamily="34" charset="0"/>
+                <a:ea typeface="Calibri" pitchFamily="34" charset="-122"/>
+                <a:cs typeface="Calibri" pitchFamily="34" charset="-120"/>
+              </a:rPr>
+              <a:t>40% יותר פניות באותו תקציב, תוך שלושה חודשים</a:t>
+            </a:r>
+            <a:endParaRPr lang="en-US" sz="1800" dirty="0"/>
           </a:p>
         </p:txBody>
       </p:sp>
